--- a/Fluctus_Laadplan_Beaumont.pptx
+++ b/Fluctus_Laadplan_Beaumont.pptx
@@ -34526,7 +34526,46 @@
       </p:sp>
       <p:sp>
         <p:nvSpPr>
-          <p:cNvPr id="813" name="Shape 811"/>
+          <p:cNvPr id="813" name="Text 811"/>
+          <p:cNvSpPr/>
+          <p:nvPr/>
+        </p:nvSpPr>
+        <p:spPr>
+          <a:xfrm>
+            <a:off x="640080" y="6071616"/>
+            <a:ext cx="10058400" cy="237744"/>
+          </a:xfrm>
+          <a:prstGeom prst="rect">
+            <a:avLst/>
+          </a:prstGeom>
+          <a:noFill/>
+          <a:ln/>
+        </p:spPr>
+        <p:txBody>
+          <a:bodyPr wrap="square" lIns="0" tIns="0" rIns="0" bIns="0" rtlCol="0" anchor="ctr"/>
+          <a:lstStyle/>
+          <a:p>
+            <a:pPr indent="0" marL="0">
+              <a:buNone/>
+            </a:pPr>
+            <a:r>
+              <a:rPr lang="en-US" sz="800" i="1" dirty="0">
+                <a:solidFill>
+                  <a:srgbClr val="5A6473"/>
+                </a:solidFill>
+                <a:latin typeface="Arial" pitchFamily="34" charset="0"/>
+                <a:ea typeface="Arial" pitchFamily="34" charset="-122"/>
+                <a:cs typeface="Arial" pitchFamily="34" charset="-120"/>
+              </a:rPr>
+              <a:t>Bron bestaande laadpunten: Departement Mobiliteit en Openbare Werken (Vlaanderen).</a:t>
+            </a:r>
+            <a:endParaRPr lang="en-US" sz="800" dirty="0"/>
+          </a:p>
+        </p:txBody>
+      </p:sp>
+      <p:sp>
+        <p:nvSpPr>
+          <p:cNvPr id="814" name="Shape 812"/>
           <p:cNvSpPr/>
           <p:nvPr/>
         </p:nvSpPr>
@@ -34546,7 +34585,7 @@
       </p:sp>
       <p:pic>
         <p:nvPicPr>
-          <p:cNvPr id="814" name="Image 0" descr="preencoded.png">    </p:cNvPr>
+          <p:cNvPr id="815" name="Image 0" descr="preencoded.png">    </p:cNvPr>
           <p:cNvPicPr>
             <a:picLocks noChangeAspect="1"/>
           </p:cNvPicPr>
@@ -34570,7 +34609,7 @@
       </p:pic>
       <p:sp>
         <p:nvSpPr>
-          <p:cNvPr id="815" name="Text 812"/>
+          <p:cNvPr id="816" name="Text 813"/>
           <p:cNvSpPr/>
           <p:nvPr/>
         </p:nvSpPr>
@@ -34612,7 +34651,7 @@
       </p:sp>
       <p:sp>
         <p:nvSpPr>
-          <p:cNvPr id="816" name="Shape 813"/>
+          <p:cNvPr id="817" name="Shape 814"/>
           <p:cNvSpPr/>
           <p:nvPr/>
         </p:nvSpPr>
@@ -34632,7 +34671,7 @@
       </p:sp>
       <p:pic>
         <p:nvPicPr>
-          <p:cNvPr id="817" name="Image 1" descr="preencoded.png">    </p:cNvPr>
+          <p:cNvPr id="818" name="Image 1" descr="preencoded.png">    </p:cNvPr>
           <p:cNvPicPr>
             <a:picLocks noChangeAspect="1"/>
           </p:cNvPicPr>
@@ -34656,7 +34695,7 @@
       </p:pic>
       <p:sp>
         <p:nvSpPr>
-          <p:cNvPr id="818" name="Text 814"/>
+          <p:cNvPr id="819" name="Text 815"/>
           <p:cNvSpPr/>
           <p:nvPr/>
         </p:nvSpPr>
@@ -34698,7 +34737,7 @@
       </p:sp>
       <p:sp>
         <p:nvSpPr>
-          <p:cNvPr id="819" name="Shape 815"/>
+          <p:cNvPr id="820" name="Shape 816"/>
           <p:cNvSpPr/>
           <p:nvPr/>
         </p:nvSpPr>
@@ -34718,7 +34757,7 @@
       </p:sp>
       <p:pic>
         <p:nvPicPr>
-          <p:cNvPr id="820" name="Image 2" descr="preencoded.png">    </p:cNvPr>
+          <p:cNvPr id="821" name="Image 2" descr="preencoded.png">    </p:cNvPr>
           <p:cNvPicPr>
             <a:picLocks noChangeAspect="1"/>
           </p:cNvPicPr>
@@ -34742,7 +34781,7 @@
       </p:pic>
       <p:sp>
         <p:nvSpPr>
-          <p:cNvPr id="821" name="Text 816"/>
+          <p:cNvPr id="822" name="Text 817"/>
           <p:cNvSpPr/>
           <p:nvPr/>
         </p:nvSpPr>
@@ -34784,7 +34823,7 @@
       </p:sp>
       <p:sp>
         <p:nvSpPr>
-          <p:cNvPr id="822" name="Text 817"/>
+          <p:cNvPr id="823" name="Text 818"/>
           <p:cNvSpPr/>
           <p:nvPr/>
         </p:nvSpPr>
@@ -34823,7 +34862,7 @@
       </p:sp>
       <p:sp>
         <p:nvSpPr>
-          <p:cNvPr id="823" name="Text 818"/>
+          <p:cNvPr id="824" name="Text 819"/>
           <p:cNvSpPr/>
           <p:nvPr/>
         </p:nvSpPr>
